--- a/Proifling and Optimisation in Python Slides.pptx
+++ b/Proifling and Optimisation in Python Slides.pptx
@@ -300,7 +300,7 @@
           <a:p>
             <a:fld id="{D2E0D2A8-8F95-47C2-ABE1-A779F5A43C98}" type="datetimeFigureOut">
               <a:rPr lang="en-US" smtClean="0"/>
-              <a:t>11/12/2024</a:t>
+              <a:t>10/16/2025</a:t>
             </a:fld>
             <a:endParaRPr lang="en-US"/>
           </a:p>
@@ -1294,7 +1294,7 @@
           <a:p>
             <a:fld id="{144556B2-9E7B-4DD1-B53F-BB328EB36A1F}" type="datetime1">
               <a:rPr lang="en-GB" smtClean="0"/>
-              <a:t>12/11/2024</a:t>
+              <a:t>16/10/2025</a:t>
             </a:fld>
             <a:endParaRPr lang="en-GB"/>
           </a:p>
@@ -1620,7 +1620,7 @@
           <a:p>
             <a:fld id="{906C2A8C-F90B-4C12-AADA-247BEB926B15}" type="datetime1">
               <a:rPr lang="en-GB" smtClean="0"/>
-              <a:t>12/11/2024</a:t>
+              <a:t>16/10/2025</a:t>
             </a:fld>
             <a:endParaRPr lang="en-GB"/>
           </a:p>
@@ -1948,7 +1948,7 @@
           <a:p>
             <a:fld id="{21752478-8F6C-4F13-8BA1-32C720EA751C}" type="datetime1">
               <a:rPr lang="en-GB" smtClean="0"/>
-              <a:t>12/11/2024</a:t>
+              <a:t>16/10/2025</a:t>
             </a:fld>
             <a:endParaRPr lang="en-GB"/>
           </a:p>
@@ -2324,7 +2324,7 @@
           <a:p>
             <a:fld id="{8FE32413-1876-4628-B0D5-C346ECACF472}" type="datetime1">
               <a:rPr lang="en-GB" smtClean="0"/>
-              <a:t>12/11/2024</a:t>
+              <a:t>16/10/2025</a:t>
             </a:fld>
             <a:endParaRPr lang="en-GB"/>
           </a:p>
@@ -2708,7 +2708,7 @@
           <a:p>
             <a:fld id="{1C9FEF1C-5E68-4FB8-AFE3-BC8A29D5EBF6}" type="datetime1">
               <a:rPr lang="en-GB" smtClean="0"/>
-              <a:t>12/11/2024</a:t>
+              <a:t>16/10/2025</a:t>
             </a:fld>
             <a:endParaRPr lang="en-GB"/>
           </a:p>
@@ -3094,7 +3094,7 @@
           <a:p>
             <a:fld id="{9859795F-3540-4CC9-A192-70D4583AC46E}" type="datetime1">
               <a:rPr lang="en-GB" smtClean="0"/>
-              <a:t>12/11/2024</a:t>
+              <a:t>16/10/2025</a:t>
             </a:fld>
             <a:endParaRPr lang="en-GB"/>
           </a:p>
@@ -3322,7 +3322,7 @@
           <a:p>
             <a:fld id="{75872C1E-CC1E-4E8A-A314-98659A61041E}" type="datetime1">
               <a:rPr lang="en-GB" smtClean="0"/>
-              <a:t>12/11/2024</a:t>
+              <a:t>16/10/2025</a:t>
             </a:fld>
             <a:endParaRPr lang="en-GB"/>
           </a:p>
@@ -3820,7 +3820,7 @@
           <a:p>
             <a:fld id="{1E40D540-E981-4608-9A77-55650E032376}" type="datetime1">
               <a:rPr lang="en-GB" smtClean="0"/>
-              <a:t>12/11/2024</a:t>
+              <a:t>16/10/2025</a:t>
             </a:fld>
             <a:endParaRPr lang="en-GB"/>
           </a:p>
@@ -4320,7 +4320,7 @@
           <a:p>
             <a:fld id="{AA7781DD-725D-4685-A585-2BC5DC856066}" type="datetime1">
               <a:rPr lang="en-GB" smtClean="0"/>
-              <a:t>12/11/2024</a:t>
+              <a:t>16/10/2025</a:t>
             </a:fld>
             <a:endParaRPr lang="en-GB"/>
           </a:p>
@@ -4810,7 +4810,7 @@
           <a:p>
             <a:fld id="{D76E72CE-B9B3-4FBD-9701-E7554343598F}" type="datetime1">
               <a:rPr lang="en-GB" smtClean="0"/>
-              <a:t>12/11/2024</a:t>
+              <a:t>16/10/2025</a:t>
             </a:fld>
             <a:endParaRPr lang="en-GB"/>
           </a:p>
@@ -5621,7 +5621,7 @@
           <a:p>
             <a:fld id="{011F2B13-1A41-47C3-AC4E-67D21CB34247}" type="datetime1">
               <a:rPr lang="en-GB" smtClean="0"/>
-              <a:t>12/11/2024</a:t>
+              <a:t>16/10/2025</a:t>
             </a:fld>
             <a:endParaRPr lang="en-GB"/>
           </a:p>
@@ -6238,7 +6238,7 @@
           <a:p>
             <a:fld id="{C254FBEC-7281-43CD-851C-F86929741A10}" type="datetime1">
               <a:rPr lang="en-GB" smtClean="0"/>
-              <a:t>12/11/2024</a:t>
+              <a:t>16/10/2025</a:t>
             </a:fld>
             <a:endParaRPr lang="en-GB"/>
           </a:p>
@@ -6858,7 +6858,7 @@
           <a:p>
             <a:fld id="{D1ED752B-5523-4036-A789-A22ED8DD1B5C}" type="datetime1">
               <a:rPr lang="en-GB" smtClean="0"/>
-              <a:t>12/11/2024</a:t>
+              <a:t>16/10/2025</a:t>
             </a:fld>
             <a:endParaRPr lang="en-GB"/>
           </a:p>
@@ -7029,7 +7029,7 @@
           <a:p>
             <a:fld id="{7E279D85-BDED-42AD-A643-8D6E061634CD}" type="datetime1">
               <a:rPr lang="en-GB" smtClean="0"/>
-              <a:t>12/11/2024</a:t>
+              <a:t>16/10/2025</a:t>
             </a:fld>
             <a:endParaRPr lang="en-GB"/>
           </a:p>
@@ -7202,7 +7202,7 @@
           <a:p>
             <a:fld id="{1EE8784A-32A8-4354-A076-C6BE94AC474E}" type="datetime1">
               <a:rPr lang="en-GB" smtClean="0"/>
-              <a:t>12/11/2024</a:t>
+              <a:t>16/10/2025</a:t>
             </a:fld>
             <a:endParaRPr lang="en-GB"/>
           </a:p>
@@ -7381,7 +7381,7 @@
           <a:p>
             <a:fld id="{383AAFB6-FC82-4A75-8FDF-4734E69327DA}" type="datetime1">
               <a:rPr lang="en-GB" smtClean="0"/>
-              <a:t>12/11/2024</a:t>
+              <a:t>16/10/2025</a:t>
             </a:fld>
             <a:endParaRPr lang="en-GB" dirty="0"/>
           </a:p>
@@ -7575,7 +7575,7 @@
           <a:p>
             <a:fld id="{E914710D-BE75-418E-ABBB-45878B67AD44}" type="datetime1">
               <a:rPr lang="en-GB" smtClean="0"/>
-              <a:t>12/11/2024</a:t>
+              <a:t>16/10/2025</a:t>
             </a:fld>
             <a:endParaRPr lang="en-GB" dirty="0"/>
           </a:p>
@@ -7855,7 +7855,7 @@
           <a:p>
             <a:fld id="{8060A021-78E8-47A4-A73E-2B2314128FBE}" type="datetime1">
               <a:rPr lang="en-GB" smtClean="0"/>
-              <a:t>12/11/2024</a:t>
+              <a:t>16/10/2025</a:t>
             </a:fld>
             <a:endParaRPr lang="en-GB" dirty="0"/>
           </a:p>
@@ -8136,7 +8136,7 @@
           <a:p>
             <a:fld id="{75B5695D-4178-4673-A4FE-7EAAD1B1708B}" type="datetime1">
               <a:rPr lang="en-GB" smtClean="0"/>
-              <a:t>12/11/2024</a:t>
+              <a:t>16/10/2025</a:t>
             </a:fld>
             <a:endParaRPr lang="en-GB" dirty="0"/>
           </a:p>
@@ -8416,7 +8416,7 @@
           <a:p>
             <a:fld id="{3C143D9A-8FB5-48FD-83A8-562C329F7858}" type="datetime1">
               <a:rPr lang="en-GB" smtClean="0"/>
-              <a:t>12/11/2024</a:t>
+              <a:t>16/10/2025</a:t>
             </a:fld>
             <a:endParaRPr lang="en-GB" dirty="0"/>
           </a:p>
@@ -8892,7 +8892,7 @@
           <a:p>
             <a:fld id="{62E00602-F867-4515-8B76-3C9CF9AA0EF5}" type="datetime1">
               <a:rPr lang="en-GB" smtClean="0"/>
-              <a:t>12/11/2024</a:t>
+              <a:t>16/10/2025</a:t>
             </a:fld>
             <a:endParaRPr lang="en-GB" dirty="0"/>
           </a:p>
@@ -9172,7 +9172,7 @@
           <a:p>
             <a:fld id="{380A48BA-6237-4BFF-8262-3D37E24BED8E}" type="datetime1">
               <a:rPr lang="en-GB" smtClean="0"/>
-              <a:t>12/11/2024</a:t>
+              <a:t>16/10/2025</a:t>
             </a:fld>
             <a:endParaRPr lang="en-GB" dirty="0"/>
           </a:p>
@@ -9452,7 +9452,7 @@
           <a:p>
             <a:fld id="{EB7350C9-1920-4F55-A8D4-58185D2A1D95}" type="datetime1">
               <a:rPr lang="en-GB" smtClean="0"/>
-              <a:t>12/11/2024</a:t>
+              <a:t>16/10/2025</a:t>
             </a:fld>
             <a:endParaRPr lang="en-GB" dirty="0"/>
           </a:p>
@@ -9716,7 +9716,7 @@
           <a:p>
             <a:fld id="{C1415A19-BB42-4FDD-B81B-0CBA36493BD3}" type="datetime1">
               <a:rPr lang="en-GB" smtClean="0"/>
-              <a:t>12/11/2024</a:t>
+              <a:t>16/10/2025</a:t>
             </a:fld>
             <a:endParaRPr lang="en-GB"/>
           </a:p>
@@ -10104,7 +10104,7 @@
           <a:p>
             <a:fld id="{33790C23-6829-4C40-BA6B-29852F5E68AC}" type="datetime1">
               <a:rPr lang="en-GB" smtClean="0"/>
-              <a:t>12/11/2024</a:t>
+              <a:t>16/10/2025</a:t>
             </a:fld>
             <a:endParaRPr lang="en-GB"/>
           </a:p>
@@ -10486,7 +10486,7 @@
           <a:p>
             <a:fld id="{9DB28AEA-3C8F-49D3-8B33-71DC80046E19}" type="datetime1">
               <a:rPr lang="en-GB" smtClean="0"/>
-              <a:t>12/11/2024</a:t>
+              <a:t>16/10/2025</a:t>
             </a:fld>
             <a:endParaRPr lang="en-GB"/>
           </a:p>
@@ -10858,7 +10858,7 @@
           <a:p>
             <a:fld id="{95A7733A-4A95-4DEE-962A-AED74667DF75}" type="datetime1">
               <a:rPr lang="en-GB" smtClean="0"/>
-              <a:t>12/11/2024</a:t>
+              <a:t>16/10/2025</a:t>
             </a:fld>
             <a:endParaRPr lang="en-GB"/>
           </a:p>
@@ -11265,7 +11265,7 @@
           <a:p>
             <a:fld id="{271C05C5-A3F6-4086-8481-A17A3A41755B}" type="datetime1">
               <a:rPr lang="en-GB" smtClean="0"/>
-              <a:t>12/11/2024</a:t>
+              <a:t>16/10/2025</a:t>
             </a:fld>
             <a:endParaRPr lang="en-GB"/>
           </a:p>
@@ -11674,7 +11674,7 @@
           <a:p>
             <a:fld id="{14886266-2C97-40F5-912B-07D12A130812}" type="datetime1">
               <a:rPr lang="en-GB" smtClean="0"/>
-              <a:t>12/11/2024</a:t>
+              <a:t>16/10/2025</a:t>
             </a:fld>
             <a:endParaRPr lang="en-GB"/>
           </a:p>
@@ -12073,7 +12073,7 @@
           <a:p>
             <a:fld id="{8BF87A05-28A2-4D5C-9314-4E24310DC8C5}" type="datetime1">
               <a:rPr lang="en-GB" smtClean="0"/>
-              <a:t>12/11/2024</a:t>
+              <a:t>16/10/2025</a:t>
             </a:fld>
             <a:endParaRPr lang="en-GB"/>
           </a:p>
@@ -12871,7 +12871,7 @@
           <a:p>
             <a:fld id="{0C9FB247-0CD0-490C-8985-7FA25D828C39}" type="datetime1">
               <a:rPr lang="en-GB" smtClean="0"/>
-              <a:t>12/11/2024</a:t>
+              <a:t>16/10/2025</a:t>
             </a:fld>
             <a:endParaRPr lang="en-GB"/>
           </a:p>
@@ -13475,7 +13475,7 @@
           <a:p>
             <a:fld id="{B9447BCD-73D3-4074-8F89-A63EBDAB5392}" type="datetime1">
               <a:rPr lang="en-GB" smtClean="0"/>
-              <a:t>12/11/2024</a:t>
+              <a:t>16/10/2025</a:t>
             </a:fld>
             <a:endParaRPr lang="en-GB"/>
           </a:p>
@@ -14069,7 +14069,7 @@
           <a:p>
             <a:fld id="{E21CF59D-EA4F-4257-B0EF-67EAAE11D561}" type="datetime1">
               <a:rPr lang="en-GB" smtClean="0"/>
-              <a:t>12/11/2024</a:t>
+              <a:t>16/10/2025</a:t>
             </a:fld>
             <a:endParaRPr lang="en-GB"/>
           </a:p>
@@ -14406,7 +14406,7 @@
           <a:p>
             <a:fld id="{486A662D-656A-469D-A081-72B4336EA861}" type="datetime1">
               <a:rPr lang="en-GB" smtClean="0"/>
-              <a:t>12/11/2024</a:t>
+              <a:t>16/10/2025</a:t>
             </a:fld>
             <a:endParaRPr lang="en-GB"/>
           </a:p>
@@ -14745,7 +14745,7 @@
           <a:p>
             <a:fld id="{5F0B848B-AEA3-4E1A-BA23-5322A0E3AB28}" type="datetime1">
               <a:rPr lang="en-GB" smtClean="0"/>
-              <a:t>12/11/2024</a:t>
+              <a:t>16/10/2025</a:t>
             </a:fld>
             <a:endParaRPr lang="en-GB"/>
           </a:p>
@@ -15074,7 +15074,7 @@
           <a:p>
             <a:fld id="{5E457192-AE0E-4DF4-B16D-BB35B6DA78DE}" type="datetime1">
               <a:rPr lang="en-GB" smtClean="0"/>
-              <a:t>12/11/2024</a:t>
+              <a:t>16/10/2025</a:t>
             </a:fld>
             <a:endParaRPr lang="en-GB"/>
           </a:p>
@@ -15411,7 +15411,7 @@
           <a:p>
             <a:fld id="{7EABDF07-61C4-42D9-8509-3F72B6359C53}" type="datetime1">
               <a:rPr lang="en-GB" smtClean="0"/>
-              <a:t>12/11/2024</a:t>
+              <a:t>16/10/2025</a:t>
             </a:fld>
             <a:endParaRPr lang="en-GB"/>
           </a:p>
@@ -15750,7 +15750,7 @@
           <a:p>
             <a:fld id="{BEFD1FC1-8A37-40E2-9C66-80F7ED708F45}" type="datetime1">
               <a:rPr lang="en-GB" smtClean="0"/>
-              <a:t>12/11/2024</a:t>
+              <a:t>16/10/2025</a:t>
             </a:fld>
             <a:endParaRPr lang="en-GB"/>
           </a:p>
@@ -16079,7 +16079,7 @@
           <a:p>
             <a:fld id="{B30B8B7E-2DF8-4625-8F01-E5E060B907D1}" type="datetime1">
               <a:rPr lang="en-GB" smtClean="0"/>
-              <a:t>12/11/2024</a:t>
+              <a:t>16/10/2025</a:t>
             </a:fld>
             <a:endParaRPr lang="en-GB"/>
           </a:p>
@@ -16317,7 +16317,7 @@
           <a:p>
             <a:fld id="{5D89B4C9-A314-4F5C-98E0-402B29B15E15}" type="datetime1">
               <a:rPr lang="en-GB" smtClean="0"/>
-              <a:t>12/11/2024</a:t>
+              <a:t>16/10/2025</a:t>
             </a:fld>
             <a:endParaRPr lang="en-GB"/>
           </a:p>
@@ -16753,7 +16753,7 @@
           <a:p>
             <a:fld id="{3F45AF60-822B-410F-B197-E75F6DF60431}" type="datetime1">
               <a:rPr lang="en-GB" smtClean="0"/>
-              <a:t>12/11/2024</a:t>
+              <a:t>16/10/2025</a:t>
             </a:fld>
             <a:endParaRPr lang="en-GB"/>
           </a:p>
@@ -17291,7 +17291,7 @@
           <a:p>
             <a:fld id="{7D467740-3B8F-41A3-8EA5-B8534F13C3B3}" type="datetime1">
               <a:rPr lang="en-GB" smtClean="0"/>
-              <a:t>12/11/2024</a:t>
+              <a:t>16/10/2025</a:t>
             </a:fld>
             <a:endParaRPr lang="en-GB"/>
           </a:p>
@@ -17570,7 +17570,7 @@
           <a:p>
             <a:fld id="{79B30FC3-1846-4B2D-82D3-2C756BE81694}" type="datetime1">
               <a:rPr lang="en-GB" smtClean="0"/>
-              <a:t>12/11/2024</a:t>
+              <a:t>16/10/2025</a:t>
             </a:fld>
             <a:endParaRPr lang="en-GB"/>
           </a:p>
@@ -17855,7 +17855,7 @@
           <a:p>
             <a:fld id="{5F205A5F-52AF-4AB3-B9BB-AD7956A299A1}" type="datetime1">
               <a:rPr lang="en-GB" smtClean="0"/>
-              <a:t>12/11/2024</a:t>
+              <a:t>16/10/2025</a:t>
             </a:fld>
             <a:endParaRPr lang="en-GB"/>
           </a:p>
@@ -18148,7 +18148,7 @@
           <a:p>
             <a:fld id="{99E6DF59-4026-4993-9254-8E1AEBF6802D}" type="datetime1">
               <a:rPr lang="en-GB" smtClean="0"/>
-              <a:t>12/11/2024</a:t>
+              <a:t>16/10/2025</a:t>
             </a:fld>
             <a:endParaRPr lang="en-GB"/>
           </a:p>
@@ -18565,7 +18565,7 @@
           <a:p>
             <a:fld id="{A34CE715-D1A7-49CE-972D-F2AE35069195}" type="datetime1">
               <a:rPr lang="en-GB" smtClean="0"/>
-              <a:t>12/11/2024</a:t>
+              <a:t>16/10/2025</a:t>
             </a:fld>
             <a:endParaRPr lang="en-GB" dirty="0"/>
           </a:p>
@@ -19353,7 +19353,7 @@
           <a:p>
             <a:fld id="{A6B0798C-C737-427A-8621-7CD88B6BE285}" type="datetime1">
               <a:rPr lang="en-GB" smtClean="0"/>
-              <a:t>12/11/2024</a:t>
+              <a:t>16/10/2025</a:t>
             </a:fld>
             <a:endParaRPr lang="en-GB"/>
           </a:p>
@@ -19605,7 +19605,7 @@
           <a:p>
             <a:fld id="{F3D28C7B-1560-4AC5-A729-2BF07782DDF5}" type="datetime1">
               <a:rPr lang="en-GB" smtClean="0"/>
-              <a:t>12/11/2024</a:t>
+              <a:t>16/10/2025</a:t>
             </a:fld>
             <a:endParaRPr lang="en-GB"/>
           </a:p>
@@ -19951,7 +19951,7 @@
           <a:p>
             <a:fld id="{B7813F7E-A2E2-45C6-9A08-61CC46C144DA}" type="datetime1">
               <a:rPr lang="en-GB" smtClean="0"/>
-              <a:t>12/11/2024</a:t>
+              <a:t>16/10/2025</a:t>
             </a:fld>
             <a:endParaRPr lang="en-GB"/>
           </a:p>
@@ -20121,7 +20121,7 @@
           <a:p>
             <a:fld id="{6B47E44B-A582-45D4-96C1-2E005F574EF9}" type="datetime1">
               <a:rPr lang="en-GB" smtClean="0"/>
-              <a:t>12/11/2024</a:t>
+              <a:t>16/10/2025</a:t>
             </a:fld>
             <a:endParaRPr lang="en-GB"/>
           </a:p>
@@ -20492,7 +20492,7 @@
           <a:p>
             <a:fld id="{D8A4A9E9-BC15-4B2A-85BE-31A72AB693BC}" type="datetime1">
               <a:rPr lang="en-GB" smtClean="0"/>
-              <a:t>12/11/2024</a:t>
+              <a:t>16/10/2025</a:t>
             </a:fld>
             <a:endParaRPr lang="en-GB"/>
           </a:p>
@@ -20706,10 +20706,10 @@
       </p:sp>
       <p:pic>
         <p:nvPicPr>
-          <p:cNvPr id="4" name="Picture 3" descr="Qr code&#10;&#10;Description automatically generated">
-            <a:extLst>
-              <a:ext uri="{FF2B5EF4-FFF2-40B4-BE49-F238E27FC236}">
-                <a16:creationId xmlns:a16="http://schemas.microsoft.com/office/drawing/2014/main" id="{89D60691-669D-C1E1-2567-473D504575B3}"/>
+          <p:cNvPr id="10" name="Picture 9" descr="A qr code on a white background&#10;&#10;AI-generated content may be incorrect.">
+            <a:extLst>
+              <a:ext uri="{FF2B5EF4-FFF2-40B4-BE49-F238E27FC236}">
+                <a16:creationId xmlns:a16="http://schemas.microsoft.com/office/drawing/2014/main" id="{8DB0FD8D-5DA8-6F79-6B1A-9EDD19CA97C2}"/>
               </a:ext>
             </a:extLst>
           </p:cNvPr>
@@ -20719,15 +20719,21 @@
           <p:nvPr/>
         </p:nvPicPr>
         <p:blipFill>
-          <a:blip r:embed="rId4"/>
+          <a:blip r:embed="rId4">
+            <a:extLst>
+              <a:ext uri="{28A0092B-C50C-407E-A947-70E740481C1C}">
+                <a14:useLocalDpi xmlns:a14="http://schemas.microsoft.com/office/drawing/2010/main" val="0"/>
+              </a:ext>
+            </a:extLst>
+          </a:blip>
           <a:stretch>
             <a:fillRect/>
           </a:stretch>
         </p:blipFill>
         <p:spPr>
           <a:xfrm>
-            <a:off x="734518" y="1420597"/>
-            <a:ext cx="4307349" cy="4307349"/>
+            <a:off x="325800" y="928000"/>
+            <a:ext cx="5167745" cy="5167745"/>
           </a:xfrm>
           <a:prstGeom prst="rect">
             <a:avLst/>

--- a/Proifling and Optimisation in Python Slides.pptx
+++ b/Proifling and Optimisation in Python Slides.pptx
@@ -139,7 +139,7 @@
 <file path=ppt/revisionInfo.xml><?xml version="1.0" encoding="utf-8"?>
 <p1510:revInfo xmlns:a="http://schemas.openxmlformats.org/drawingml/2006/main" xmlns:r="http://schemas.openxmlformats.org/officeDocument/2006/relationships" xmlns:p1510="http://schemas.microsoft.com/office/powerpoint/2015/10/main">
   <p1510:revLst>
-    <p1510:client id="{C2F9924A-84FC-4DC7-84BD-E956D321B824}" v="11" dt="2024-11-14T09:20:03.893"/>
+    <p1510:client id="{3D377327-C700-4767-BF9F-33F523DF7EF1}" v="2" dt="2025-10-24T08:53:50.826"/>
   </p1510:revLst>
 </p1510:revInfo>
 </file>
@@ -166,22 +166,6 @@
           <pc:docMk/>
           <pc:sldMk cId="3528320225" sldId="325"/>
         </pc:sldMkLst>
-        <pc:spChg chg="mod">
-          <ac:chgData name="Cooling, Chris" userId="6dcf99c9-2ba5-410a-8445-0893a3d1421f" providerId="ADAL" clId="{C2F9924A-84FC-4DC7-84BD-E956D321B824}" dt="2024-11-11T14:50:47.791" v="40" actId="20577"/>
-          <ac:spMkLst>
-            <pc:docMk/>
-            <pc:sldMk cId="3528320225" sldId="325"/>
-            <ac:spMk id="2" creationId="{2C63C0BA-CA37-DEB8-790F-7E3E6CE2E963}"/>
-          </ac:spMkLst>
-        </pc:spChg>
-        <pc:spChg chg="mod">
-          <ac:chgData name="Cooling, Chris" userId="6dcf99c9-2ba5-410a-8445-0893a3d1421f" providerId="ADAL" clId="{C2F9924A-84FC-4DC7-84BD-E956D321B824}" dt="2024-11-11T14:51:05.241" v="83" actId="20577"/>
-          <ac:spMkLst>
-            <pc:docMk/>
-            <pc:sldMk cId="3528320225" sldId="325"/>
-            <ac:spMk id="3" creationId="{F5563428-ABDB-D4AE-2088-152ADB16C28C}"/>
-          </ac:spMkLst>
-        </pc:spChg>
       </pc:sldChg>
       <pc:sldChg chg="modSp mod">
         <pc:chgData name="Cooling, Chris" userId="6dcf99c9-2ba5-410a-8445-0893a3d1421f" providerId="ADAL" clId="{C2F9924A-84FC-4DC7-84BD-E956D321B824}" dt="2024-11-11T14:55:10.381" v="98" actId="20577"/>
@@ -189,14 +173,6 @@
           <pc:docMk/>
           <pc:sldMk cId="16407505" sldId="361"/>
         </pc:sldMkLst>
-        <pc:spChg chg="mod">
-          <ac:chgData name="Cooling, Chris" userId="6dcf99c9-2ba5-410a-8445-0893a3d1421f" providerId="ADAL" clId="{C2F9924A-84FC-4DC7-84BD-E956D321B824}" dt="2024-11-11T14:55:10.381" v="98" actId="20577"/>
-          <ac:spMkLst>
-            <pc:docMk/>
-            <pc:sldMk cId="16407505" sldId="361"/>
-            <ac:spMk id="3" creationId="{3059243C-26C4-B42B-1D89-75DB3A5CA945}"/>
-          </ac:spMkLst>
-        </pc:spChg>
       </pc:sldChg>
       <pc:sldChg chg="modSp mod">
         <pc:chgData name="Cooling, Chris" userId="6dcf99c9-2ba5-410a-8445-0893a3d1421f" providerId="ADAL" clId="{C2F9924A-84FC-4DC7-84BD-E956D321B824}" dt="2024-11-11T15:06:04.913" v="541" actId="20577"/>
@@ -204,12 +180,28 @@
           <pc:docMk/>
           <pc:sldMk cId="4288594215" sldId="407"/>
         </pc:sldMkLst>
+      </pc:sldChg>
+    </pc:docChg>
+  </pc:docChgLst>
+  <pc:docChgLst>
+    <pc:chgData name="Cooling, Chris" userId="6dcf99c9-2ba5-410a-8445-0893a3d1421f" providerId="ADAL" clId="{3D377327-C700-4767-BF9F-33F523DF7EF1}"/>
+    <pc:docChg chg="modSld">
+      <pc:chgData name="Cooling, Chris" userId="6dcf99c9-2ba5-410a-8445-0893a3d1421f" providerId="ADAL" clId="{3D377327-C700-4767-BF9F-33F523DF7EF1}" dt="2025-10-24T08:53:50.822" v="1" actId="20577"/>
+      <pc:docMkLst>
+        <pc:docMk/>
+      </pc:docMkLst>
+      <pc:sldChg chg="modSp mod">
+        <pc:chgData name="Cooling, Chris" userId="6dcf99c9-2ba5-410a-8445-0893a3d1421f" providerId="ADAL" clId="{3D377327-C700-4767-BF9F-33F523DF7EF1}" dt="2025-10-24T08:53:50.822" v="1" actId="20577"/>
+        <pc:sldMkLst>
+          <pc:docMk/>
+          <pc:sldMk cId="1507190070" sldId="359"/>
+        </pc:sldMkLst>
         <pc:spChg chg="mod">
-          <ac:chgData name="Cooling, Chris" userId="6dcf99c9-2ba5-410a-8445-0893a3d1421f" providerId="ADAL" clId="{C2F9924A-84FC-4DC7-84BD-E956D321B824}" dt="2024-11-11T15:06:04.913" v="541" actId="20577"/>
+          <ac:chgData name="Cooling, Chris" userId="6dcf99c9-2ba5-410a-8445-0893a3d1421f" providerId="ADAL" clId="{3D377327-C700-4767-BF9F-33F523DF7EF1}" dt="2025-10-24T08:53:50.822" v="1" actId="20577"/>
           <ac:spMkLst>
             <pc:docMk/>
-            <pc:sldMk cId="4288594215" sldId="407"/>
-            <ac:spMk id="3" creationId="{AE72B19A-BAEF-7DAE-DDC1-54394DA86691}"/>
+            <pc:sldMk cId="1507190070" sldId="359"/>
+            <ac:spMk id="6" creationId="{F67B57BE-29B8-B7BA-15CB-930F83F6EB26}"/>
           </ac:spMkLst>
         </pc:spChg>
       </pc:sldChg>
@@ -300,7 +292,7 @@
           <a:p>
             <a:fld id="{D2E0D2A8-8F95-47C2-ABE1-A779F5A43C98}" type="datetimeFigureOut">
               <a:rPr lang="en-US" smtClean="0"/>
-              <a:t>10/16/2025</a:t>
+              <a:t>10/24/2025</a:t>
             </a:fld>
             <a:endParaRPr lang="en-US"/>
           </a:p>
@@ -1294,7 +1286,7 @@
           <a:p>
             <a:fld id="{144556B2-9E7B-4DD1-B53F-BB328EB36A1F}" type="datetime1">
               <a:rPr lang="en-GB" smtClean="0"/>
-              <a:t>16/10/2025</a:t>
+              <a:t>24/10/2025</a:t>
             </a:fld>
             <a:endParaRPr lang="en-GB"/>
           </a:p>
@@ -1620,7 +1612,7 @@
           <a:p>
             <a:fld id="{906C2A8C-F90B-4C12-AADA-247BEB926B15}" type="datetime1">
               <a:rPr lang="en-GB" smtClean="0"/>
-              <a:t>16/10/2025</a:t>
+              <a:t>24/10/2025</a:t>
             </a:fld>
             <a:endParaRPr lang="en-GB"/>
           </a:p>
@@ -1948,7 +1940,7 @@
           <a:p>
             <a:fld id="{21752478-8F6C-4F13-8BA1-32C720EA751C}" type="datetime1">
               <a:rPr lang="en-GB" smtClean="0"/>
-              <a:t>16/10/2025</a:t>
+              <a:t>24/10/2025</a:t>
             </a:fld>
             <a:endParaRPr lang="en-GB"/>
           </a:p>
@@ -2324,7 +2316,7 @@
           <a:p>
             <a:fld id="{8FE32413-1876-4628-B0D5-C346ECACF472}" type="datetime1">
               <a:rPr lang="en-GB" smtClean="0"/>
-              <a:t>16/10/2025</a:t>
+              <a:t>24/10/2025</a:t>
             </a:fld>
             <a:endParaRPr lang="en-GB"/>
           </a:p>
@@ -2708,7 +2700,7 @@
           <a:p>
             <a:fld id="{1C9FEF1C-5E68-4FB8-AFE3-BC8A29D5EBF6}" type="datetime1">
               <a:rPr lang="en-GB" smtClean="0"/>
-              <a:t>16/10/2025</a:t>
+              <a:t>24/10/2025</a:t>
             </a:fld>
             <a:endParaRPr lang="en-GB"/>
           </a:p>
@@ -3094,7 +3086,7 @@
           <a:p>
             <a:fld id="{9859795F-3540-4CC9-A192-70D4583AC46E}" type="datetime1">
               <a:rPr lang="en-GB" smtClean="0"/>
-              <a:t>16/10/2025</a:t>
+              <a:t>24/10/2025</a:t>
             </a:fld>
             <a:endParaRPr lang="en-GB"/>
           </a:p>
@@ -3322,7 +3314,7 @@
           <a:p>
             <a:fld id="{75872C1E-CC1E-4E8A-A314-98659A61041E}" type="datetime1">
               <a:rPr lang="en-GB" smtClean="0"/>
-              <a:t>16/10/2025</a:t>
+              <a:t>24/10/2025</a:t>
             </a:fld>
             <a:endParaRPr lang="en-GB"/>
           </a:p>
@@ -3820,7 +3812,7 @@
           <a:p>
             <a:fld id="{1E40D540-E981-4608-9A77-55650E032376}" type="datetime1">
               <a:rPr lang="en-GB" smtClean="0"/>
-              <a:t>16/10/2025</a:t>
+              <a:t>24/10/2025</a:t>
             </a:fld>
             <a:endParaRPr lang="en-GB"/>
           </a:p>
@@ -4320,7 +4312,7 @@
           <a:p>
             <a:fld id="{AA7781DD-725D-4685-A585-2BC5DC856066}" type="datetime1">
               <a:rPr lang="en-GB" smtClean="0"/>
-              <a:t>16/10/2025</a:t>
+              <a:t>24/10/2025</a:t>
             </a:fld>
             <a:endParaRPr lang="en-GB"/>
           </a:p>
@@ -4810,7 +4802,7 @@
           <a:p>
             <a:fld id="{D76E72CE-B9B3-4FBD-9701-E7554343598F}" type="datetime1">
               <a:rPr lang="en-GB" smtClean="0"/>
-              <a:t>16/10/2025</a:t>
+              <a:t>24/10/2025</a:t>
             </a:fld>
             <a:endParaRPr lang="en-GB"/>
           </a:p>
@@ -5621,7 +5613,7 @@
           <a:p>
             <a:fld id="{011F2B13-1A41-47C3-AC4E-67D21CB34247}" type="datetime1">
               <a:rPr lang="en-GB" smtClean="0"/>
-              <a:t>16/10/2025</a:t>
+              <a:t>24/10/2025</a:t>
             </a:fld>
             <a:endParaRPr lang="en-GB"/>
           </a:p>
@@ -6238,7 +6230,7 @@
           <a:p>
             <a:fld id="{C254FBEC-7281-43CD-851C-F86929741A10}" type="datetime1">
               <a:rPr lang="en-GB" smtClean="0"/>
-              <a:t>16/10/2025</a:t>
+              <a:t>24/10/2025</a:t>
             </a:fld>
             <a:endParaRPr lang="en-GB"/>
           </a:p>
@@ -6858,7 +6850,7 @@
           <a:p>
             <a:fld id="{D1ED752B-5523-4036-A789-A22ED8DD1B5C}" type="datetime1">
               <a:rPr lang="en-GB" smtClean="0"/>
-              <a:t>16/10/2025</a:t>
+              <a:t>24/10/2025</a:t>
             </a:fld>
             <a:endParaRPr lang="en-GB"/>
           </a:p>
@@ -7029,7 +7021,7 @@
           <a:p>
             <a:fld id="{7E279D85-BDED-42AD-A643-8D6E061634CD}" type="datetime1">
               <a:rPr lang="en-GB" smtClean="0"/>
-              <a:t>16/10/2025</a:t>
+              <a:t>24/10/2025</a:t>
             </a:fld>
             <a:endParaRPr lang="en-GB"/>
           </a:p>
@@ -7202,7 +7194,7 @@
           <a:p>
             <a:fld id="{1EE8784A-32A8-4354-A076-C6BE94AC474E}" type="datetime1">
               <a:rPr lang="en-GB" smtClean="0"/>
-              <a:t>16/10/2025</a:t>
+              <a:t>24/10/2025</a:t>
             </a:fld>
             <a:endParaRPr lang="en-GB"/>
           </a:p>
@@ -7381,7 +7373,7 @@
           <a:p>
             <a:fld id="{383AAFB6-FC82-4A75-8FDF-4734E69327DA}" type="datetime1">
               <a:rPr lang="en-GB" smtClean="0"/>
-              <a:t>16/10/2025</a:t>
+              <a:t>24/10/2025</a:t>
             </a:fld>
             <a:endParaRPr lang="en-GB" dirty="0"/>
           </a:p>
@@ -7575,7 +7567,7 @@
           <a:p>
             <a:fld id="{E914710D-BE75-418E-ABBB-45878B67AD44}" type="datetime1">
               <a:rPr lang="en-GB" smtClean="0"/>
-              <a:t>16/10/2025</a:t>
+              <a:t>24/10/2025</a:t>
             </a:fld>
             <a:endParaRPr lang="en-GB" dirty="0"/>
           </a:p>
@@ -7855,7 +7847,7 @@
           <a:p>
             <a:fld id="{8060A021-78E8-47A4-A73E-2B2314128FBE}" type="datetime1">
               <a:rPr lang="en-GB" smtClean="0"/>
-              <a:t>16/10/2025</a:t>
+              <a:t>24/10/2025</a:t>
             </a:fld>
             <a:endParaRPr lang="en-GB" dirty="0"/>
           </a:p>
@@ -8136,7 +8128,7 @@
           <a:p>
             <a:fld id="{75B5695D-4178-4673-A4FE-7EAAD1B1708B}" type="datetime1">
               <a:rPr lang="en-GB" smtClean="0"/>
-              <a:t>16/10/2025</a:t>
+              <a:t>24/10/2025</a:t>
             </a:fld>
             <a:endParaRPr lang="en-GB" dirty="0"/>
           </a:p>
@@ -8416,7 +8408,7 @@
           <a:p>
             <a:fld id="{3C143D9A-8FB5-48FD-83A8-562C329F7858}" type="datetime1">
               <a:rPr lang="en-GB" smtClean="0"/>
-              <a:t>16/10/2025</a:t>
+              <a:t>24/10/2025</a:t>
             </a:fld>
             <a:endParaRPr lang="en-GB" dirty="0"/>
           </a:p>
@@ -8892,7 +8884,7 @@
           <a:p>
             <a:fld id="{62E00602-F867-4515-8B76-3C9CF9AA0EF5}" type="datetime1">
               <a:rPr lang="en-GB" smtClean="0"/>
-              <a:t>16/10/2025</a:t>
+              <a:t>24/10/2025</a:t>
             </a:fld>
             <a:endParaRPr lang="en-GB" dirty="0"/>
           </a:p>
@@ -9172,7 +9164,7 @@
           <a:p>
             <a:fld id="{380A48BA-6237-4BFF-8262-3D37E24BED8E}" type="datetime1">
               <a:rPr lang="en-GB" smtClean="0"/>
-              <a:t>16/10/2025</a:t>
+              <a:t>24/10/2025</a:t>
             </a:fld>
             <a:endParaRPr lang="en-GB" dirty="0"/>
           </a:p>
@@ -9452,7 +9444,7 @@
           <a:p>
             <a:fld id="{EB7350C9-1920-4F55-A8D4-58185D2A1D95}" type="datetime1">
               <a:rPr lang="en-GB" smtClean="0"/>
-              <a:t>16/10/2025</a:t>
+              <a:t>24/10/2025</a:t>
             </a:fld>
             <a:endParaRPr lang="en-GB" dirty="0"/>
           </a:p>
@@ -9716,7 +9708,7 @@
           <a:p>
             <a:fld id="{C1415A19-BB42-4FDD-B81B-0CBA36493BD3}" type="datetime1">
               <a:rPr lang="en-GB" smtClean="0"/>
-              <a:t>16/10/2025</a:t>
+              <a:t>24/10/2025</a:t>
             </a:fld>
             <a:endParaRPr lang="en-GB"/>
           </a:p>
@@ -10104,7 +10096,7 @@
           <a:p>
             <a:fld id="{33790C23-6829-4C40-BA6B-29852F5E68AC}" type="datetime1">
               <a:rPr lang="en-GB" smtClean="0"/>
-              <a:t>16/10/2025</a:t>
+              <a:t>24/10/2025</a:t>
             </a:fld>
             <a:endParaRPr lang="en-GB"/>
           </a:p>
@@ -10486,7 +10478,7 @@
           <a:p>
             <a:fld id="{9DB28AEA-3C8F-49D3-8B33-71DC80046E19}" type="datetime1">
               <a:rPr lang="en-GB" smtClean="0"/>
-              <a:t>16/10/2025</a:t>
+              <a:t>24/10/2025</a:t>
             </a:fld>
             <a:endParaRPr lang="en-GB"/>
           </a:p>
@@ -10858,7 +10850,7 @@
           <a:p>
             <a:fld id="{95A7733A-4A95-4DEE-962A-AED74667DF75}" type="datetime1">
               <a:rPr lang="en-GB" smtClean="0"/>
-              <a:t>16/10/2025</a:t>
+              <a:t>24/10/2025</a:t>
             </a:fld>
             <a:endParaRPr lang="en-GB"/>
           </a:p>
@@ -11265,7 +11257,7 @@
           <a:p>
             <a:fld id="{271C05C5-A3F6-4086-8481-A17A3A41755B}" type="datetime1">
               <a:rPr lang="en-GB" smtClean="0"/>
-              <a:t>16/10/2025</a:t>
+              <a:t>24/10/2025</a:t>
             </a:fld>
             <a:endParaRPr lang="en-GB"/>
           </a:p>
@@ -11674,7 +11666,7 @@
           <a:p>
             <a:fld id="{14886266-2C97-40F5-912B-07D12A130812}" type="datetime1">
               <a:rPr lang="en-GB" smtClean="0"/>
-              <a:t>16/10/2025</a:t>
+              <a:t>24/10/2025</a:t>
             </a:fld>
             <a:endParaRPr lang="en-GB"/>
           </a:p>
@@ -12073,7 +12065,7 @@
           <a:p>
             <a:fld id="{8BF87A05-28A2-4D5C-9314-4E24310DC8C5}" type="datetime1">
               <a:rPr lang="en-GB" smtClean="0"/>
-              <a:t>16/10/2025</a:t>
+              <a:t>24/10/2025</a:t>
             </a:fld>
             <a:endParaRPr lang="en-GB"/>
           </a:p>
@@ -12871,7 +12863,7 @@
           <a:p>
             <a:fld id="{0C9FB247-0CD0-490C-8985-7FA25D828C39}" type="datetime1">
               <a:rPr lang="en-GB" smtClean="0"/>
-              <a:t>16/10/2025</a:t>
+              <a:t>24/10/2025</a:t>
             </a:fld>
             <a:endParaRPr lang="en-GB"/>
           </a:p>
@@ -13475,7 +13467,7 @@
           <a:p>
             <a:fld id="{B9447BCD-73D3-4074-8F89-A63EBDAB5392}" type="datetime1">
               <a:rPr lang="en-GB" smtClean="0"/>
-              <a:t>16/10/2025</a:t>
+              <a:t>24/10/2025</a:t>
             </a:fld>
             <a:endParaRPr lang="en-GB"/>
           </a:p>
@@ -14069,7 +14061,7 @@
           <a:p>
             <a:fld id="{E21CF59D-EA4F-4257-B0EF-67EAAE11D561}" type="datetime1">
               <a:rPr lang="en-GB" smtClean="0"/>
-              <a:t>16/10/2025</a:t>
+              <a:t>24/10/2025</a:t>
             </a:fld>
             <a:endParaRPr lang="en-GB"/>
           </a:p>
@@ -14406,7 +14398,7 @@
           <a:p>
             <a:fld id="{486A662D-656A-469D-A081-72B4336EA861}" type="datetime1">
               <a:rPr lang="en-GB" smtClean="0"/>
-              <a:t>16/10/2025</a:t>
+              <a:t>24/10/2025</a:t>
             </a:fld>
             <a:endParaRPr lang="en-GB"/>
           </a:p>
@@ -14745,7 +14737,7 @@
           <a:p>
             <a:fld id="{5F0B848B-AEA3-4E1A-BA23-5322A0E3AB28}" type="datetime1">
               <a:rPr lang="en-GB" smtClean="0"/>
-              <a:t>16/10/2025</a:t>
+              <a:t>24/10/2025</a:t>
             </a:fld>
             <a:endParaRPr lang="en-GB"/>
           </a:p>
@@ -15074,7 +15066,7 @@
           <a:p>
             <a:fld id="{5E457192-AE0E-4DF4-B16D-BB35B6DA78DE}" type="datetime1">
               <a:rPr lang="en-GB" smtClean="0"/>
-              <a:t>16/10/2025</a:t>
+              <a:t>24/10/2025</a:t>
             </a:fld>
             <a:endParaRPr lang="en-GB"/>
           </a:p>
@@ -15411,7 +15403,7 @@
           <a:p>
             <a:fld id="{7EABDF07-61C4-42D9-8509-3F72B6359C53}" type="datetime1">
               <a:rPr lang="en-GB" smtClean="0"/>
-              <a:t>16/10/2025</a:t>
+              <a:t>24/10/2025</a:t>
             </a:fld>
             <a:endParaRPr lang="en-GB"/>
           </a:p>
@@ -15750,7 +15742,7 @@
           <a:p>
             <a:fld id="{BEFD1FC1-8A37-40E2-9C66-80F7ED708F45}" type="datetime1">
               <a:rPr lang="en-GB" smtClean="0"/>
-              <a:t>16/10/2025</a:t>
+              <a:t>24/10/2025</a:t>
             </a:fld>
             <a:endParaRPr lang="en-GB"/>
           </a:p>
@@ -16079,7 +16071,7 @@
           <a:p>
             <a:fld id="{B30B8B7E-2DF8-4625-8F01-E5E060B907D1}" type="datetime1">
               <a:rPr lang="en-GB" smtClean="0"/>
-              <a:t>16/10/2025</a:t>
+              <a:t>24/10/2025</a:t>
             </a:fld>
             <a:endParaRPr lang="en-GB"/>
           </a:p>
@@ -16317,7 +16309,7 @@
           <a:p>
             <a:fld id="{5D89B4C9-A314-4F5C-98E0-402B29B15E15}" type="datetime1">
               <a:rPr lang="en-GB" smtClean="0"/>
-              <a:t>16/10/2025</a:t>
+              <a:t>24/10/2025</a:t>
             </a:fld>
             <a:endParaRPr lang="en-GB"/>
           </a:p>
@@ -16753,7 +16745,7 @@
           <a:p>
             <a:fld id="{3F45AF60-822B-410F-B197-E75F6DF60431}" type="datetime1">
               <a:rPr lang="en-GB" smtClean="0"/>
-              <a:t>16/10/2025</a:t>
+              <a:t>24/10/2025</a:t>
             </a:fld>
             <a:endParaRPr lang="en-GB"/>
           </a:p>
@@ -17291,7 +17283,7 @@
           <a:p>
             <a:fld id="{7D467740-3B8F-41A3-8EA5-B8534F13C3B3}" type="datetime1">
               <a:rPr lang="en-GB" smtClean="0"/>
-              <a:t>16/10/2025</a:t>
+              <a:t>24/10/2025</a:t>
             </a:fld>
             <a:endParaRPr lang="en-GB"/>
           </a:p>
@@ -17570,7 +17562,7 @@
           <a:p>
             <a:fld id="{79B30FC3-1846-4B2D-82D3-2C756BE81694}" type="datetime1">
               <a:rPr lang="en-GB" smtClean="0"/>
-              <a:t>16/10/2025</a:t>
+              <a:t>24/10/2025</a:t>
             </a:fld>
             <a:endParaRPr lang="en-GB"/>
           </a:p>
@@ -17855,7 +17847,7 @@
           <a:p>
             <a:fld id="{5F205A5F-52AF-4AB3-B9BB-AD7956A299A1}" type="datetime1">
               <a:rPr lang="en-GB" smtClean="0"/>
-              <a:t>16/10/2025</a:t>
+              <a:t>24/10/2025</a:t>
             </a:fld>
             <a:endParaRPr lang="en-GB"/>
           </a:p>
@@ -18148,7 +18140,7 @@
           <a:p>
             <a:fld id="{99E6DF59-4026-4993-9254-8E1AEBF6802D}" type="datetime1">
               <a:rPr lang="en-GB" smtClean="0"/>
-              <a:t>16/10/2025</a:t>
+              <a:t>24/10/2025</a:t>
             </a:fld>
             <a:endParaRPr lang="en-GB"/>
           </a:p>
@@ -18565,7 +18557,7 @@
           <a:p>
             <a:fld id="{A34CE715-D1A7-49CE-972D-F2AE35069195}" type="datetime1">
               <a:rPr lang="en-GB" smtClean="0"/>
-              <a:t>16/10/2025</a:t>
+              <a:t>24/10/2025</a:t>
             </a:fld>
             <a:endParaRPr lang="en-GB" dirty="0"/>
           </a:p>
@@ -19353,7 +19345,7 @@
           <a:p>
             <a:fld id="{A6B0798C-C737-427A-8621-7CD88B6BE285}" type="datetime1">
               <a:rPr lang="en-GB" smtClean="0"/>
-              <a:t>16/10/2025</a:t>
+              <a:t>24/10/2025</a:t>
             </a:fld>
             <a:endParaRPr lang="en-GB"/>
           </a:p>
@@ -19605,7 +19597,7 @@
           <a:p>
             <a:fld id="{F3D28C7B-1560-4AC5-A729-2BF07782DDF5}" type="datetime1">
               <a:rPr lang="en-GB" smtClean="0"/>
-              <a:t>16/10/2025</a:t>
+              <a:t>24/10/2025</a:t>
             </a:fld>
             <a:endParaRPr lang="en-GB"/>
           </a:p>
@@ -19951,7 +19943,7 @@
           <a:p>
             <a:fld id="{B7813F7E-A2E2-45C6-9A08-61CC46C144DA}" type="datetime1">
               <a:rPr lang="en-GB" smtClean="0"/>
-              <a:t>16/10/2025</a:t>
+              <a:t>24/10/2025</a:t>
             </a:fld>
             <a:endParaRPr lang="en-GB"/>
           </a:p>
@@ -20121,7 +20113,7 @@
           <a:p>
             <a:fld id="{6B47E44B-A582-45D4-96C1-2E005F574EF9}" type="datetime1">
               <a:rPr lang="en-GB" smtClean="0"/>
-              <a:t>16/10/2025</a:t>
+              <a:t>24/10/2025</a:t>
             </a:fld>
             <a:endParaRPr lang="en-GB"/>
           </a:p>
@@ -20492,7 +20484,7 @@
           <a:p>
             <a:fld id="{D8A4A9E9-BC15-4B2A-85BE-31A72AB693BC}" type="datetime1">
               <a:rPr lang="en-GB" smtClean="0"/>
-              <a:t>16/10/2025</a:t>
+              <a:t>24/10/2025</a:t>
             </a:fld>
             <a:endParaRPr lang="en-GB"/>
           </a:p>
@@ -20660,23 +20652,25 @@
             </a:pPr>
             <a:r>
               <a:rPr lang="en-GB" sz="2600" dirty="0"/>
-              <a:t>The link is </a:t>
-            </a:r>
-            <a:r>
-              <a:rPr lang="en-GB" sz="2600" b="0" i="0" u="sng" dirty="0">
+              <a:t>The link </a:t>
+            </a:r>
+            <a:r>
+              <a:rPr lang="en-GB" sz="2600"/>
+              <a:t>is </a:t>
+            </a:r>
+            <a:r>
+              <a:rPr lang="en-GB" sz="2600" u="sng">
                 <a:solidFill>
                   <a:srgbClr val="0563C1"/>
                 </a:solidFill>
-                <a:effectLst/>
                 <a:hlinkClick r:id="rId3"/>
               </a:rPr>
-              <a:t>https://tinyurl.com/feedback-rcds</a:t>
-            </a:r>
-            <a:endParaRPr lang="en-GB" sz="2600" b="0" i="0" u="sng" dirty="0">
+              <a:t>https://ecri.short.gy/feedback-rcds</a:t>
+            </a:r>
+            <a:endParaRPr lang="en-GB" sz="2600" u="sng">
               <a:solidFill>
                 <a:srgbClr val="0563C1"/>
               </a:solidFill>
-              <a:effectLst/>
             </a:endParaRPr>
           </a:p>
           <a:p>
@@ -20685,8 +20679,12 @@
               <a:buChar char="•"/>
             </a:pPr>
             <a:r>
+              <a:rPr lang="en-GB" sz="2600"/>
+              <a:t>You </a:t>
+            </a:r>
+            <a:r>
               <a:rPr lang="en-GB" sz="2600" dirty="0"/>
-              <a:t>You should also have received an email with this link</a:t>
+              <a:t>should also have received an email with this link</a:t>
             </a:r>
           </a:p>
           <a:p>

--- a/Proifling and Optimisation in Python Slides.pptx
+++ b/Proifling and Optimisation in Python Slides.pptx
@@ -5,7 +5,7 @@
     <p:sldMasterId id="2147483648" r:id="rId1"/>
   </p:sldMasterIdLst>
   <p:notesMasterIdLst>
-    <p:notesMasterId r:id="rId10"/>
+    <p:notesMasterId r:id="rId9"/>
   </p:notesMasterIdLst>
   <p:sldIdLst>
     <p:sldId id="325" r:id="rId2"/>
@@ -14,8 +14,7 @@
     <p:sldId id="408" r:id="rId5"/>
     <p:sldId id="407" r:id="rId6"/>
     <p:sldId id="359" r:id="rId7"/>
-    <p:sldId id="406" r:id="rId8"/>
-    <p:sldId id="279" r:id="rId9"/>
+    <p:sldId id="279" r:id="rId8"/>
   </p:sldIdLst>
   <p:sldSz cx="12192000" cy="6858000"/>
   <p:notesSz cx="6858000" cy="9144000"/>
@@ -185,8 +184,8 @@
   </pc:docChgLst>
   <pc:docChgLst>
     <pc:chgData name="Cooling, Chris" userId="6dcf99c9-2ba5-410a-8445-0893a3d1421f" providerId="ADAL" clId="{3D377327-C700-4767-BF9F-33F523DF7EF1}"/>
-    <pc:docChg chg="modSld">
-      <pc:chgData name="Cooling, Chris" userId="6dcf99c9-2ba5-410a-8445-0893a3d1421f" providerId="ADAL" clId="{3D377327-C700-4767-BF9F-33F523DF7EF1}" dt="2025-10-24T08:53:50.822" v="1" actId="20577"/>
+    <pc:docChg chg="delSld modSld">
+      <pc:chgData name="Cooling, Chris" userId="6dcf99c9-2ba5-410a-8445-0893a3d1421f" providerId="ADAL" clId="{3D377327-C700-4767-BF9F-33F523DF7EF1}" dt="2025-10-24T10:08:49.487" v="2" actId="47"/>
       <pc:docMkLst>
         <pc:docMk/>
       </pc:docMkLst>
@@ -204,6 +203,13 @@
             <ac:spMk id="6" creationId="{F67B57BE-29B8-B7BA-15CB-930F83F6EB26}"/>
           </ac:spMkLst>
         </pc:spChg>
+      </pc:sldChg>
+      <pc:sldChg chg="del">
+        <pc:chgData name="Cooling, Chris" userId="6dcf99c9-2ba5-410a-8445-0893a3d1421f" providerId="ADAL" clId="{3D377327-C700-4767-BF9F-33F523DF7EF1}" dt="2025-10-24T10:08:49.487" v="2" actId="47"/>
+        <pc:sldMkLst>
+          <pc:docMk/>
+          <pc:sldMk cId="3543295302" sldId="406"/>
+        </pc:sldMkLst>
       </pc:sldChg>
     </pc:docChg>
   </pc:docChgLst>
@@ -830,97 +836,6 @@
     <p:extLst>
       <p:ext uri="{BB962C8B-B14F-4D97-AF65-F5344CB8AC3E}">
         <p14:creationId xmlns:p14="http://schemas.microsoft.com/office/powerpoint/2010/main" val="328910392"/>
-      </p:ext>
-    </p:extLst>
-  </p:cSld>
-  <p:clrMapOvr>
-    <a:masterClrMapping/>
-  </p:clrMapOvr>
-</p:notes>
-</file>
-
-<file path=ppt/notesSlides/notesSlide4.xml><?xml version="1.0" encoding="utf-8"?>
-<p:notes xmlns:a="http://schemas.openxmlformats.org/drawingml/2006/main" xmlns:r="http://schemas.openxmlformats.org/officeDocument/2006/relationships" xmlns:p="http://schemas.openxmlformats.org/presentationml/2006/main">
-  <p:cSld>
-    <p:spTree>
-      <p:nvGrpSpPr>
-        <p:cNvPr id="1" name=""/>
-        <p:cNvGrpSpPr/>
-        <p:nvPr/>
-      </p:nvGrpSpPr>
-      <p:grpSpPr>
-        <a:xfrm>
-          <a:off x="0" y="0"/>
-          <a:ext cx="0" cy="0"/>
-          <a:chOff x="0" y="0"/>
-          <a:chExt cx="0" cy="0"/>
-        </a:xfrm>
-      </p:grpSpPr>
-      <p:sp>
-        <p:nvSpPr>
-          <p:cNvPr id="2" name="Slide Image Placeholder 1"/>
-          <p:cNvSpPr>
-            <a:spLocks noGrp="1" noRot="1" noChangeAspect="1"/>
-          </p:cNvSpPr>
-          <p:nvPr>
-            <p:ph type="sldImg"/>
-          </p:nvPr>
-        </p:nvSpPr>
-        <p:spPr/>
-      </p:sp>
-      <p:sp>
-        <p:nvSpPr>
-          <p:cNvPr id="3" name="Notes Placeholder 2"/>
-          <p:cNvSpPr>
-            <a:spLocks noGrp="1"/>
-          </p:cNvSpPr>
-          <p:nvPr>
-            <p:ph type="body" idx="1"/>
-          </p:nvPr>
-        </p:nvSpPr>
-        <p:spPr/>
-        <p:txBody>
-          <a:bodyPr/>
-          <a:lstStyle/>
-          <a:p>
-            <a:r>
-              <a:rPr lang="en-GB" dirty="0"/>
-              <a:t>Remove after </a:t>
-            </a:r>
-            <a:r>
-              <a:rPr lang="en-GB"/>
-              <a:t>PRES closes</a:t>
-            </a:r>
-          </a:p>
-        </p:txBody>
-      </p:sp>
-      <p:sp>
-        <p:nvSpPr>
-          <p:cNvPr id="4" name="Slide Number Placeholder 3"/>
-          <p:cNvSpPr>
-            <a:spLocks noGrp="1"/>
-          </p:cNvSpPr>
-          <p:nvPr>
-            <p:ph type="sldNum" sz="quarter" idx="5"/>
-          </p:nvPr>
-        </p:nvSpPr>
-        <p:spPr/>
-        <p:txBody>
-          <a:bodyPr/>
-          <a:lstStyle/>
-          <a:p>
-            <a:fld id="{877663E2-27CE-4C79-91D3-7F5C4262D57F}" type="slidenum">
-              <a:rPr lang="en-US" smtClean="0"/>
-              <a:t>7</a:t>
-            </a:fld>
-            <a:endParaRPr lang="en-US"/>
-          </a:p>
-        </p:txBody>
-      </p:sp>
-    </p:spTree>
-    <p:extLst>
-      <p:ext uri="{BB962C8B-B14F-4D97-AF65-F5344CB8AC3E}">
-        <p14:creationId xmlns:p14="http://schemas.microsoft.com/office/powerpoint/2010/main" val="2593689646"/>
       </p:ext>
     </p:extLst>
   </p:cSld>
@@ -20755,282 +20670,6 @@
 </file>
 
 <file path=ppt/slides/slide7.xml><?xml version="1.0" encoding="utf-8"?>
-<p:sld xmlns:a="http://schemas.openxmlformats.org/drawingml/2006/main" xmlns:r="http://schemas.openxmlformats.org/officeDocument/2006/relationships" xmlns:p="http://schemas.openxmlformats.org/presentationml/2006/main">
-  <p:cSld>
-    <p:spTree>
-      <p:nvGrpSpPr>
-        <p:cNvPr id="1" name=""/>
-        <p:cNvGrpSpPr/>
-        <p:nvPr/>
-      </p:nvGrpSpPr>
-      <p:grpSpPr>
-        <a:xfrm>
-          <a:off x="0" y="0"/>
-          <a:ext cx="0" cy="0"/>
-          <a:chOff x="0" y="0"/>
-          <a:chExt cx="0" cy="0"/>
-        </a:xfrm>
-      </p:grpSpPr>
-      <p:sp>
-        <p:nvSpPr>
-          <p:cNvPr id="2" name="Title 1">
-            <a:extLst>
-              <a:ext uri="{FF2B5EF4-FFF2-40B4-BE49-F238E27FC236}">
-                <a16:creationId xmlns:a16="http://schemas.microsoft.com/office/drawing/2014/main" id="{E1AC92A0-DAFD-2CE4-F5BD-315A0135CDD6}"/>
-              </a:ext>
-            </a:extLst>
-          </p:cNvPr>
-          <p:cNvSpPr>
-            <a:spLocks noGrp="1"/>
-          </p:cNvSpPr>
-          <p:nvPr>
-            <p:ph type="ctrTitle"/>
-          </p:nvPr>
-        </p:nvSpPr>
-        <p:spPr>
-          <a:xfrm>
-            <a:off x="330200" y="1864819"/>
-            <a:ext cx="4742772" cy="1828800"/>
-          </a:xfrm>
-        </p:spPr>
-        <p:txBody>
-          <a:bodyPr/>
-          <a:lstStyle/>
-          <a:p>
-            <a:r>
-              <a:rPr lang="en-US" dirty="0">
-                <a:solidFill>
-                  <a:srgbClr val="98FB98"/>
-                </a:solidFill>
-              </a:rPr>
-              <a:t>PRES 2025</a:t>
-            </a:r>
-          </a:p>
-        </p:txBody>
-      </p:sp>
-      <p:sp>
-        <p:nvSpPr>
-          <p:cNvPr id="3" name="Text Placeholder 2">
-            <a:extLst>
-              <a:ext uri="{FF2B5EF4-FFF2-40B4-BE49-F238E27FC236}">
-                <a16:creationId xmlns:a16="http://schemas.microsoft.com/office/drawing/2014/main" id="{0B6972F5-B010-8428-D0AA-F619C83E71DE}"/>
-              </a:ext>
-            </a:extLst>
-          </p:cNvPr>
-          <p:cNvSpPr>
-            <a:spLocks noGrp="1"/>
-          </p:cNvSpPr>
-          <p:nvPr>
-            <p:ph type="body" sz="quarter" idx="4294967295"/>
-          </p:nvPr>
-        </p:nvSpPr>
-        <p:spPr>
-          <a:xfrm>
-            <a:off x="330200" y="5878513"/>
-            <a:ext cx="5606257" cy="652463"/>
-          </a:xfrm>
-        </p:spPr>
-        <p:txBody>
-          <a:bodyPr/>
-          <a:lstStyle/>
-          <a:p>
-            <a:r>
-              <a:rPr lang="en-US" dirty="0"/>
-              <a:t>Presentation Title</a:t>
-            </a:r>
-          </a:p>
-          <a:p>
-            <a:r>
-              <a:rPr lang="en-US" dirty="0"/>
-              <a:t>DD/MM/YYYY</a:t>
-            </a:r>
-          </a:p>
-        </p:txBody>
-      </p:sp>
-      <p:pic>
-        <p:nvPicPr>
-          <p:cNvPr id="4" name="Picture 3">
-            <a:extLst>
-              <a:ext uri="{FF2B5EF4-FFF2-40B4-BE49-F238E27FC236}">
-                <a16:creationId xmlns:a16="http://schemas.microsoft.com/office/drawing/2014/main" id="{A18BDFF0-9D53-5DAB-3700-2938EAF96CEE}"/>
-              </a:ext>
-            </a:extLst>
-          </p:cNvPr>
-          <p:cNvPicPr>
-            <a:picLocks noChangeAspect="1"/>
-          </p:cNvPicPr>
-          <p:nvPr/>
-        </p:nvPicPr>
-        <p:blipFill>
-          <a:blip r:embed="rId3" cstate="print">
-            <a:extLst>
-              <a:ext uri="{28A0092B-C50C-407E-A947-70E740481C1C}">
-                <a14:useLocalDpi xmlns:a14="http://schemas.microsoft.com/office/drawing/2010/main" val="0"/>
-              </a:ext>
-            </a:extLst>
-          </a:blip>
-          <a:stretch>
-            <a:fillRect/>
-          </a:stretch>
-        </p:blipFill>
-        <p:spPr>
-          <a:xfrm>
-            <a:off x="9169653" y="417970"/>
-            <a:ext cx="2448272" cy="1446849"/>
-          </a:xfrm>
-          <a:prstGeom prst="rect">
-            <a:avLst/>
-          </a:prstGeom>
-          <a:solidFill>
-            <a:srgbClr val="98FB98"/>
-          </a:solidFill>
-          <a:effectLst>
-            <a:outerShdw blurRad="50800" dist="50800" dir="5400000" algn="ctr" rotWithShape="0">
-              <a:srgbClr val="98FB98"/>
-            </a:outerShdw>
-          </a:effectLst>
-        </p:spPr>
-      </p:pic>
-      <p:sp>
-        <p:nvSpPr>
-          <p:cNvPr id="6" name="Title 1">
-            <a:extLst>
-              <a:ext uri="{FF2B5EF4-FFF2-40B4-BE49-F238E27FC236}">
-                <a16:creationId xmlns:a16="http://schemas.microsoft.com/office/drawing/2014/main" id="{0742163F-282C-50FB-3BC2-3BC83316980D}"/>
-              </a:ext>
-            </a:extLst>
-          </p:cNvPr>
-          <p:cNvSpPr txBox="1">
-            <a:spLocks/>
-          </p:cNvSpPr>
-          <p:nvPr/>
-        </p:nvSpPr>
-        <p:spPr>
-          <a:xfrm>
-            <a:off x="399472" y="4079052"/>
-            <a:ext cx="11376891" cy="1828800"/>
-          </a:xfrm>
-          <a:prstGeom prst="rect">
-            <a:avLst/>
-          </a:prstGeom>
-        </p:spPr>
-        <p:txBody>
-          <a:bodyPr vert="horz" lIns="0" tIns="0" rIns="0" bIns="0" rtlCol="0" anchor="t">
-            <a:noAutofit/>
-          </a:bodyPr>
-          <a:lstStyle>
-            <a:lvl1pPr algn="l" defTabSz="685765" rtl="0" eaLnBrk="1" latinLnBrk="0" hangingPunct="1">
-              <a:lnSpc>
-                <a:spcPct val="90000"/>
-              </a:lnSpc>
-              <a:spcBef>
-                <a:spcPct val="0"/>
-              </a:spcBef>
-              <a:buNone/>
-              <a:defRPr sz="6400" b="1" kern="1200">
-                <a:solidFill>
-                  <a:srgbClr val="98FB98"/>
-                </a:solidFill>
-                <a:latin typeface="+mj-lt"/>
-                <a:ea typeface="+mj-ea"/>
-                <a:cs typeface="+mj-cs"/>
-              </a:defRPr>
-            </a:lvl1pPr>
-          </a:lstStyle>
-          <a:p>
-            <a:pPr marL="342900" indent="-342900">
-              <a:lnSpc>
-                <a:spcPct val="100000"/>
-              </a:lnSpc>
-              <a:buFont typeface="Arial" panose="020B0604020202020204" pitchFamily="34" charset="0"/>
-              <a:buChar char="•"/>
-            </a:pPr>
-            <a:r>
-              <a:rPr lang="en-US" sz="2000" dirty="0"/>
-              <a:t>Coming in 2025 - PRES is a national survey for research degree students</a:t>
-            </a:r>
-          </a:p>
-          <a:p>
-            <a:pPr marL="342900" indent="-342900">
-              <a:lnSpc>
-                <a:spcPct val="100000"/>
-              </a:lnSpc>
-              <a:buFont typeface="Arial" panose="020B0604020202020204" pitchFamily="34" charset="0"/>
-              <a:buChar char="•"/>
-            </a:pPr>
-            <a:endParaRPr lang="en-US" sz="2000" dirty="0"/>
-          </a:p>
-          <a:p>
-            <a:pPr marL="342900" indent="-342900">
-              <a:lnSpc>
-                <a:spcPct val="100000"/>
-              </a:lnSpc>
-              <a:buFont typeface="Arial" panose="020B0604020202020204" pitchFamily="34" charset="0"/>
-              <a:buChar char="•"/>
-            </a:pPr>
-            <a:r>
-              <a:rPr lang="en-US" sz="2000" dirty="0"/>
-              <a:t>Find out more about the action we have taken in response to the previous PRES: </a:t>
-            </a:r>
-          </a:p>
-          <a:p>
-            <a:pPr marL="342900" indent="-342900">
-              <a:lnSpc>
-                <a:spcPct val="100000"/>
-              </a:lnSpc>
-              <a:buFont typeface="Arial" panose="020B0604020202020204" pitchFamily="34" charset="0"/>
-              <a:buChar char="•"/>
-            </a:pPr>
-            <a:endParaRPr lang="en-US" sz="2000" dirty="0"/>
-          </a:p>
-          <a:p>
-            <a:pPr marL="342900" indent="-342900">
-              <a:lnSpc>
-                <a:spcPct val="100000"/>
-              </a:lnSpc>
-              <a:buFont typeface="Arial" panose="020B0604020202020204" pitchFamily="34" charset="0"/>
-              <a:buChar char="•"/>
-            </a:pPr>
-            <a:r>
-              <a:rPr lang="en-US" sz="2000" dirty="0">
-                <a:solidFill>
-                  <a:srgbClr val="EE82EE"/>
-                </a:solidFill>
-                <a:hlinkClick r:id="rId4">
-                  <a:extLst>
-                    <a:ext uri="{A12FA001-AC4F-418D-AE19-62706E023703}">
-                      <ahyp:hlinkClr xmlns:ahyp="http://schemas.microsoft.com/office/drawing/2018/hyperlinkcolor" val="tx"/>
-                    </a:ext>
-                  </a:extLst>
-                </a:hlinkClick>
-              </a:rPr>
-              <a:t>Postgraduate Research Experience Survey (PRES) | Current students | Imperial College London</a:t>
-            </a:r>
-            <a:endParaRPr lang="en-US" sz="2000" dirty="0">
-              <a:solidFill>
-                <a:srgbClr val="EE82EE"/>
-              </a:solidFill>
-            </a:endParaRPr>
-          </a:p>
-        </p:txBody>
-      </p:sp>
-    </p:spTree>
-    <p:extLst>
-      <p:ext uri="{BB962C8B-B14F-4D97-AF65-F5344CB8AC3E}">
-        <p14:creationId xmlns:p14="http://schemas.microsoft.com/office/powerpoint/2010/main" val="3543295302"/>
-      </p:ext>
-    </p:extLst>
-  </p:cSld>
-  <p:clrMapOvr>
-    <a:masterClrMapping/>
-  </p:clrMapOvr>
-  <p:transition>
-    <p:fade/>
-  </p:transition>
-</p:sld>
-</file>
-
-<file path=ppt/slides/slide8.xml><?xml version="1.0" encoding="utf-8"?>
 <p:sld xmlns:a="http://schemas.openxmlformats.org/drawingml/2006/main" xmlns:r="http://schemas.openxmlformats.org/officeDocument/2006/relationships" xmlns:p="http://schemas.openxmlformats.org/presentationml/2006/main">
   <p:cSld>
     <p:spTree>
